--- a/studio-di-fattibilita/deliverables-FINAL/DECK-HALE-3slide-EN.pptx
+++ b/studio-di-fattibilita/deliverables-FINAL/DECK-HALE-3slide-EN.pptx
@@ -3133,382 +3133,9 @@
           </a:p>
         </p:txBody>
       </p:sp>
-      <p:sp>
-        <p:nvSpPr>
-          <p:cNvPr id="3" name="TextBox 2"/>
-          <p:cNvSpPr txBox="1"/>
-          <p:nvPr/>
-        </p:nvSpPr>
-        <p:spPr>
-          <a:xfrm>
-            <a:off x="540000" y="540000"/>
-            <a:ext cx="7200000" cy="720000"/>
-          </a:xfrm>
-          <a:prstGeom prst="rect">
-            <a:avLst/>
-          </a:prstGeom>
-          <a:noFill/>
-        </p:spPr>
-        <p:txBody>
-          <a:bodyPr wrap="square" anchor="t" lIns="0" rIns="0" tIns="0" bIns="0">
-            <a:spAutoFit/>
-          </a:bodyPr>
-          <a:lstStyle/>
-          <a:p>
-            <a:pPr algn="l">
-              <a:lnSpc>
-                <a:spcPct val="120000"/>
-              </a:lnSpc>
-            </a:pPr>
-            <a:r>
-              <a:rPr sz="4600" b="1" i="0">
-                <a:solidFill>
-                  <a:srgbClr val="FFFFFF"/>
-                </a:solidFill>
-                <a:latin typeface="Inter"/>
-              </a:rPr>
-              <a:t>Project H.A.L.E.</a:t>
-            </a:r>
-          </a:p>
-        </p:txBody>
-      </p:sp>
-      <p:sp>
-        <p:nvSpPr>
-          <p:cNvPr id="4" name="TextBox 3"/>
-          <p:cNvSpPr txBox="1"/>
-          <p:nvPr/>
-        </p:nvSpPr>
-        <p:spPr>
-          <a:xfrm>
-            <a:off x="540000" y="1260000"/>
-            <a:ext cx="7200000" cy="360000"/>
-          </a:xfrm>
-          <a:prstGeom prst="rect">
-            <a:avLst/>
-          </a:prstGeom>
-          <a:noFill/>
-        </p:spPr>
-        <p:txBody>
-          <a:bodyPr wrap="square" anchor="t" lIns="0" rIns="0" tIns="0" bIns="0">
-            <a:spAutoFit/>
-          </a:bodyPr>
-          <a:lstStyle/>
-          <a:p>
-            <a:pPr algn="l">
-              <a:lnSpc>
-                <a:spcPct val="120000"/>
-              </a:lnSpc>
-            </a:pPr>
-            <a:r>
-              <a:rPr sz="2200" b="0" i="0">
-                <a:solidFill>
-                  <a:srgbClr val="FFFFFF"/>
-                </a:solidFill>
-                <a:latin typeface="Inter"/>
-              </a:rPr>
-              <a:t>(High Altitude Long Endurance)</a:t>
-            </a:r>
-          </a:p>
-        </p:txBody>
-      </p:sp>
-      <p:sp>
-        <p:nvSpPr>
-          <p:cNvPr id="5" name="TextBox 4"/>
-          <p:cNvSpPr txBox="1"/>
-          <p:nvPr/>
-        </p:nvSpPr>
-        <p:spPr>
-          <a:xfrm>
-            <a:off x="540000" y="1980000"/>
-            <a:ext cx="5400000" cy="900000"/>
-          </a:xfrm>
-          <a:prstGeom prst="rect">
-            <a:avLst/>
-          </a:prstGeom>
-          <a:noFill/>
-        </p:spPr>
-        <p:txBody>
-          <a:bodyPr wrap="square" anchor="t" lIns="0" rIns="0" tIns="0" bIns="0">
-            <a:spAutoFit/>
-          </a:bodyPr>
-          <a:lstStyle/>
-          <a:p>
-            <a:pPr algn="l">
-              <a:lnSpc>
-                <a:spcPct val="140000"/>
-              </a:lnSpc>
-            </a:pPr>
-            <a:r>
-              <a:rPr sz="2000" b="0" i="0">
-                <a:solidFill>
-                  <a:srgbClr val="FFFFFF"/>
-                </a:solidFill>
-                <a:latin typeface="Consolas"/>
-              </a:rPr>
-              <a:t>The cooperative pseudo-satellite</a:t>
-            </a:r>
-          </a:p>
-          <a:p>
-            <a:pPr algn="l">
-              <a:lnSpc>
-                <a:spcPct val="140000"/>
-              </a:lnSpc>
-            </a:pPr>
-            <a:r>
-              <a:rPr sz="2000" b="0" i="0">
-                <a:solidFill>
-                  <a:srgbClr val="FFFFFF"/>
-                </a:solidFill>
-                <a:latin typeface="Consolas"/>
-              </a:rPr>
-              <a:t>for national resilience.</a:t>
-            </a:r>
-          </a:p>
-        </p:txBody>
-      </p:sp>
-      <p:sp>
-        <p:nvSpPr>
-          <p:cNvPr id="6" name="TextBox 5"/>
-          <p:cNvSpPr txBox="1"/>
-          <p:nvPr/>
-        </p:nvSpPr>
-        <p:spPr>
-          <a:xfrm>
-            <a:off x="540000" y="3420000"/>
-            <a:ext cx="5400000" cy="324000"/>
-          </a:xfrm>
-          <a:prstGeom prst="rect">
-            <a:avLst/>
-          </a:prstGeom>
-          <a:noFill/>
-        </p:spPr>
-        <p:txBody>
-          <a:bodyPr wrap="square" anchor="t" lIns="0" rIns="0" tIns="0" bIns="0">
-            <a:spAutoFit/>
-          </a:bodyPr>
-          <a:lstStyle/>
-          <a:p>
-            <a:pPr algn="l">
-              <a:lnSpc>
-                <a:spcPct val="130000"/>
-              </a:lnSpc>
-            </a:pPr>
-            <a:r>
-              <a:rPr sz="1600" b="0" i="0">
-                <a:solidFill>
-                  <a:srgbClr val="A8C5EB"/>
-                </a:solidFill>
-                <a:latin typeface="Consolas"/>
-              </a:rPr>
-              <a:t>Operating altitude </a:t>
-            </a:r>
-            <a:r>
-              <a:rPr sz="1600" b="1" i="0">
-                <a:solidFill>
-                  <a:srgbClr val="FFFFFF"/>
-                </a:solidFill>
-                <a:latin typeface="Consolas"/>
-              </a:rPr>
-              <a:t>20 km</a:t>
-            </a:r>
-          </a:p>
-        </p:txBody>
-      </p:sp>
-      <p:sp>
-        <p:nvSpPr>
-          <p:cNvPr id="7" name="TextBox 6"/>
-          <p:cNvSpPr txBox="1"/>
-          <p:nvPr/>
-        </p:nvSpPr>
-        <p:spPr>
-          <a:xfrm>
-            <a:off x="540000" y="3816000"/>
-            <a:ext cx="5400000" cy="324000"/>
-          </a:xfrm>
-          <a:prstGeom prst="rect">
-            <a:avLst/>
-          </a:prstGeom>
-          <a:noFill/>
-        </p:spPr>
-        <p:txBody>
-          <a:bodyPr wrap="square" anchor="t" lIns="0" rIns="0" tIns="0" bIns="0">
-            <a:spAutoFit/>
-          </a:bodyPr>
-          <a:lstStyle/>
-          <a:p>
-            <a:pPr algn="l">
-              <a:lnSpc>
-                <a:spcPct val="130000"/>
-              </a:lnSpc>
-            </a:pPr>
-            <a:r>
-              <a:rPr sz="1600" b="0" i="0">
-                <a:solidFill>
-                  <a:srgbClr val="A8C5EB"/>
-                </a:solidFill>
-                <a:latin typeface="Consolas"/>
-              </a:rPr>
-              <a:t>Macro-regional coverage </a:t>
-            </a:r>
-            <a:r>
-              <a:rPr sz="1600" b="1" i="0">
-                <a:solidFill>
-                  <a:srgbClr val="FFFFFF"/>
-                </a:solidFill>
-                <a:latin typeface="Consolas"/>
-              </a:rPr>
-              <a:t>&gt; 500 km</a:t>
-            </a:r>
-          </a:p>
-        </p:txBody>
-      </p:sp>
-      <p:sp>
-        <p:nvSpPr>
-          <p:cNvPr id="8" name="TextBox 7"/>
-          <p:cNvSpPr txBox="1"/>
-          <p:nvPr/>
-        </p:nvSpPr>
-        <p:spPr>
-          <a:xfrm>
-            <a:off x="540000" y="4212000"/>
-            <a:ext cx="5400000" cy="324000"/>
-          </a:xfrm>
-          <a:prstGeom prst="rect">
-            <a:avLst/>
-          </a:prstGeom>
-          <a:noFill/>
-        </p:spPr>
-        <p:txBody>
-          <a:bodyPr wrap="square" anchor="t" lIns="0" rIns="0" tIns="0" bIns="0">
-            <a:spAutoFit/>
-          </a:bodyPr>
-          <a:lstStyle/>
-          <a:p>
-            <a:pPr algn="l">
-              <a:lnSpc>
-                <a:spcPct val="130000"/>
-              </a:lnSpc>
-            </a:pPr>
-            <a:r>
-              <a:rPr sz="1600" b="0" i="0">
-                <a:solidFill>
-                  <a:srgbClr val="A8C5EB"/>
-                </a:solidFill>
-                <a:latin typeface="Consolas"/>
-              </a:rPr>
-              <a:t>Latency </a:t>
-            </a:r>
-            <a:r>
-              <a:rPr sz="1600" b="1" i="0">
-                <a:solidFill>
-                  <a:srgbClr val="FFFFFF"/>
-                </a:solidFill>
-                <a:latin typeface="Consolas"/>
-              </a:rPr>
-              <a:t>&lt; 20 ms</a:t>
-            </a:r>
-          </a:p>
-        </p:txBody>
-      </p:sp>
-      <p:sp>
-        <p:nvSpPr>
-          <p:cNvPr id="9" name="TextBox 8"/>
-          <p:cNvSpPr txBox="1"/>
-          <p:nvPr/>
-        </p:nvSpPr>
-        <p:spPr>
-          <a:xfrm>
-            <a:off x="540000" y="4608000"/>
-            <a:ext cx="5400000" cy="324000"/>
-          </a:xfrm>
-          <a:prstGeom prst="rect">
-            <a:avLst/>
-          </a:prstGeom>
-          <a:noFill/>
-        </p:spPr>
-        <p:txBody>
-          <a:bodyPr wrap="square" anchor="t" lIns="0" rIns="0" tIns="0" bIns="0">
-            <a:spAutoFit/>
-          </a:bodyPr>
-          <a:lstStyle/>
-          <a:p>
-            <a:pPr algn="l">
-              <a:lnSpc>
-                <a:spcPct val="130000"/>
-              </a:lnSpc>
-            </a:pPr>
-            <a:r>
-              <a:rPr sz="1600" b="0" i="0">
-                <a:solidFill>
-                  <a:srgbClr val="A8C5EB"/>
-                </a:solidFill>
-                <a:latin typeface="Consolas"/>
-              </a:rPr>
-              <a:t>Propulsion </a:t>
-            </a:r>
-            <a:r>
-              <a:rPr sz="1600" b="1" i="0">
-                <a:solidFill>
-                  <a:srgbClr val="FFFFFF"/>
-                </a:solidFill>
-                <a:latin typeface="Consolas"/>
-              </a:rPr>
-              <a:t>Solar-electric</a:t>
-            </a:r>
-          </a:p>
-        </p:txBody>
-      </p:sp>
-      <p:sp>
-        <p:nvSpPr>
-          <p:cNvPr id="10" name="TextBox 9"/>
-          <p:cNvSpPr txBox="1"/>
-          <p:nvPr/>
-        </p:nvSpPr>
-        <p:spPr>
-          <a:xfrm>
-            <a:off x="540000" y="5004000"/>
-            <a:ext cx="5400000" cy="324000"/>
-          </a:xfrm>
-          <a:prstGeom prst="rect">
-            <a:avLst/>
-          </a:prstGeom>
-          <a:noFill/>
-        </p:spPr>
-        <p:txBody>
-          <a:bodyPr wrap="square" anchor="t" lIns="0" rIns="0" tIns="0" bIns="0">
-            <a:spAutoFit/>
-          </a:bodyPr>
-          <a:lstStyle/>
-          <a:p>
-            <a:pPr algn="l">
-              <a:lnSpc>
-                <a:spcPct val="130000"/>
-              </a:lnSpc>
-            </a:pPr>
-            <a:r>
-              <a:rPr sz="1600" b="0" i="0">
-                <a:solidFill>
-                  <a:srgbClr val="A8C5EB"/>
-                </a:solidFill>
-                <a:latin typeface="Consolas"/>
-              </a:rPr>
-              <a:t>Endurance target </a:t>
-            </a:r>
-            <a:r>
-              <a:rPr sz="1600" b="1" i="0">
-                <a:solidFill>
-                  <a:srgbClr val="FFFFFF"/>
-                </a:solidFill>
-                <a:latin typeface="Consolas"/>
-              </a:rPr>
-              <a:t>30+ days perennial (Y3)</a:t>
-            </a:r>
-          </a:p>
-        </p:txBody>
-      </p:sp>
       <p:pic>
         <p:nvPicPr>
-          <p:cNvPr id="11" name="Picture 10" descr="HALE2.png"/>
+          <p:cNvPr id="3" name="Picture 2" descr="team_firmamento_wide.jpg"/>
           <p:cNvPicPr>
             <a:picLocks noChangeAspect="1"/>
           </p:cNvPicPr>
@@ -3522,29 +3149,465 @@
         </p:blipFill>
         <p:spPr>
           <a:xfrm>
-            <a:off x="5940000" y="1620000"/>
-            <a:ext cx="5760000" cy="3960000"/>
+            <a:off x="0" y="0"/>
+            <a:ext cx="12192119" cy="3957359"/>
           </a:xfrm>
           <a:prstGeom prst="rect">
             <a:avLst/>
           </a:prstGeom>
         </p:spPr>
       </p:pic>
+      <p:sp>
+        <p:nvSpPr>
+          <p:cNvPr id="4" name="Rectangle 3"/>
+          <p:cNvSpPr/>
+          <p:nvPr/>
+        </p:nvSpPr>
+        <p:spPr>
+          <a:xfrm>
+            <a:off x="0" y="0"/>
+            <a:ext cx="12192119" cy="1260000"/>
+          </a:xfrm>
+          <a:prstGeom prst="rect">
+            <a:avLst/>
+          </a:prstGeom>
+          <a:solidFill>
+            <a:srgbClr val="0A1A3D">
+              <a:alpha val="55000"/>
+            </a:srgbClr>
+          </a:solidFill>
+          <a:ln>
+            <a:noFill/>
+          </a:ln>
+        </p:spPr>
+        <p:style>
+          <a:lnRef idx="1">
+            <a:schemeClr val="accent1"/>
+          </a:lnRef>
+          <a:fillRef idx="3">
+            <a:schemeClr val="accent1"/>
+          </a:fillRef>
+          <a:effectRef idx="2">
+            <a:schemeClr val="accent1"/>
+          </a:effectRef>
+          <a:fontRef idx="minor">
+            <a:schemeClr val="lt1"/>
+          </a:fontRef>
+        </p:style>
+        <p:txBody>
+          <a:bodyPr rtlCol="0" anchor="ctr"/>
+          <a:lstStyle/>
+          <a:p>
+            <a:pPr algn="ctr"/>
+          </a:p>
+        </p:txBody>
+      </p:sp>
+      <p:sp>
+        <p:nvSpPr>
+          <p:cNvPr id="5" name="TextBox 4"/>
+          <p:cNvSpPr txBox="1"/>
+          <p:nvPr/>
+        </p:nvSpPr>
+        <p:spPr>
+          <a:xfrm>
+            <a:off x="540000" y="324000"/>
+            <a:ext cx="11112119" cy="324000"/>
+          </a:xfrm>
+          <a:prstGeom prst="rect">
+            <a:avLst/>
+          </a:prstGeom>
+          <a:noFill/>
+        </p:spPr>
+        <p:txBody>
+          <a:bodyPr wrap="square" anchor="t" lIns="0" rIns="0" tIns="0" bIns="0">
+            <a:spAutoFit/>
+          </a:bodyPr>
+          <a:lstStyle/>
+          <a:p>
+            <a:pPr algn="ctr">
+              <a:lnSpc>
+                <a:spcPct val="100000"/>
+              </a:lnSpc>
+            </a:pPr>
+            <a:r>
+              <a:rPr sz="1300" b="1" i="0">
+                <a:solidFill>
+                  <a:srgbClr val="F0C95C"/>
+                </a:solidFill>
+                <a:latin typeface="Inter"/>
+              </a:rPr>
+              <a:t>DEEP-TECH ECOSYSTEM</a:t>
+            </a:r>
+          </a:p>
+        </p:txBody>
+      </p:sp>
+      <p:sp>
+        <p:nvSpPr>
+          <p:cNvPr id="6" name="TextBox 5"/>
+          <p:cNvSpPr txBox="1"/>
+          <p:nvPr/>
+        </p:nvSpPr>
+        <p:spPr>
+          <a:xfrm>
+            <a:off x="540000" y="576000"/>
+            <a:ext cx="11112119" cy="648000"/>
+          </a:xfrm>
+          <a:prstGeom prst="rect">
+            <a:avLst/>
+          </a:prstGeom>
+          <a:noFill/>
+        </p:spPr>
+        <p:txBody>
+          <a:bodyPr wrap="square" anchor="t" lIns="0" rIns="0" tIns="0" bIns="0">
+            <a:spAutoFit/>
+          </a:bodyPr>
+          <a:lstStyle/>
+          <a:p>
+            <a:pPr algn="ctr">
+              <a:lnSpc>
+                <a:spcPct val="100000"/>
+              </a:lnSpc>
+            </a:pPr>
+            <a:r>
+              <a:rPr sz="4000" b="1" i="0">
+                <a:solidFill>
+                  <a:srgbClr val="FFFFFF"/>
+                </a:solidFill>
+                <a:latin typeface="Inter"/>
+              </a:rPr>
+              <a:t>Humans Keep Purpose</a:t>
+            </a:r>
+          </a:p>
+        </p:txBody>
+      </p:sp>
+      <p:sp>
+        <p:nvSpPr>
+          <p:cNvPr id="7" name="Rectangle 6"/>
+          <p:cNvSpPr/>
+          <p:nvPr/>
+        </p:nvSpPr>
+        <p:spPr>
+          <a:xfrm>
+            <a:off x="0" y="3960000"/>
+            <a:ext cx="12192119" cy="36000"/>
+          </a:xfrm>
+          <a:prstGeom prst="rect">
+            <a:avLst/>
+          </a:prstGeom>
+          <a:solidFill>
+            <a:srgbClr val="F0C95C"/>
+          </a:solidFill>
+          <a:ln>
+            <a:noFill/>
+          </a:ln>
+        </p:spPr>
+        <p:style>
+          <a:lnRef idx="1">
+            <a:schemeClr val="accent1"/>
+          </a:lnRef>
+          <a:fillRef idx="3">
+            <a:schemeClr val="accent1"/>
+          </a:fillRef>
+          <a:effectRef idx="2">
+            <a:schemeClr val="accent1"/>
+          </a:effectRef>
+          <a:fontRef idx="minor">
+            <a:schemeClr val="lt1"/>
+          </a:fontRef>
+        </p:style>
+        <p:txBody>
+          <a:bodyPr rtlCol="0" anchor="ctr"/>
+          <a:lstStyle/>
+          <a:p>
+            <a:pPr algn="ctr"/>
+          </a:p>
+        </p:txBody>
+      </p:sp>
+      <p:sp>
+        <p:nvSpPr>
+          <p:cNvPr id="8" name="TextBox 7"/>
+          <p:cNvSpPr txBox="1"/>
+          <p:nvPr/>
+        </p:nvSpPr>
+        <p:spPr>
+          <a:xfrm>
+            <a:off x="720000" y="4140000"/>
+            <a:ext cx="5040000" cy="324000"/>
+          </a:xfrm>
+          <a:prstGeom prst="rect">
+            <a:avLst/>
+          </a:prstGeom>
+          <a:noFill/>
+        </p:spPr>
+        <p:txBody>
+          <a:bodyPr wrap="square" anchor="t" lIns="0" rIns="0" tIns="0" bIns="0">
+            <a:spAutoFit/>
+          </a:bodyPr>
+          <a:lstStyle/>
+          <a:p>
+            <a:pPr algn="l">
+              <a:lnSpc>
+                <a:spcPct val="120000"/>
+              </a:lnSpc>
+            </a:pPr>
+            <a:r>
+              <a:rPr sz="2000" b="1" i="0">
+                <a:solidFill>
+                  <a:srgbClr val="A8C5EB"/>
+                </a:solidFill>
+                <a:latin typeface="Inter"/>
+              </a:rPr>
+              <a:t>DOPE Hubs (Non-Profit)</a:t>
+            </a:r>
+          </a:p>
+        </p:txBody>
+      </p:sp>
+      <p:sp>
+        <p:nvSpPr>
+          <p:cNvPr id="9" name="TextBox 8"/>
+          <p:cNvSpPr txBox="1"/>
+          <p:nvPr/>
+        </p:nvSpPr>
+        <p:spPr>
+          <a:xfrm>
+            <a:off x="720000" y="4572000"/>
+            <a:ext cx="5040000" cy="900000"/>
+          </a:xfrm>
+          <a:prstGeom prst="rect">
+            <a:avLst/>
+          </a:prstGeom>
+          <a:noFill/>
+        </p:spPr>
+        <p:txBody>
+          <a:bodyPr wrap="square" anchor="t" lIns="0" rIns="0" tIns="0" bIns="0">
+            <a:spAutoFit/>
+          </a:bodyPr>
+          <a:lstStyle/>
+          <a:p>
+            <a:pPr algn="l">
+              <a:lnSpc>
+                <a:spcPct val="150000"/>
+              </a:lnSpc>
+            </a:pPr>
+            <a:r>
+              <a:rPr sz="1300" b="0" i="0">
+                <a:solidFill>
+                  <a:srgbClr val="FFFFFF"/>
+                </a:solidFill>
+                <a:latin typeface="Consolas"/>
+              </a:rPr>
+              <a:t>Excellence training and applied research.</a:t>
+            </a:r>
+          </a:p>
+          <a:p>
+            <a:pPr algn="l">
+              <a:lnSpc>
+                <a:spcPct val="150000"/>
+              </a:lnSpc>
+            </a:pPr>
+            <a:r>
+              <a:rPr sz="1300" b="0" i="0">
+                <a:solidFill>
+                  <a:srgbClr val="FFFFFF"/>
+                </a:solidFill>
+                <a:latin typeface="Consolas"/>
+              </a:rPr>
+              <a:t>The product is the people.</a:t>
+            </a:r>
+          </a:p>
+        </p:txBody>
+      </p:sp>
+      <p:sp>
+        <p:nvSpPr>
+          <p:cNvPr id="10" name="Right Arrow 9"/>
+          <p:cNvSpPr/>
+          <p:nvPr/>
+        </p:nvSpPr>
+        <p:spPr>
+          <a:xfrm>
+            <a:off x="5940000" y="4248000"/>
+            <a:ext cx="360000" cy="216000"/>
+          </a:xfrm>
+          <a:prstGeom prst="rightArrow">
+            <a:avLst/>
+          </a:prstGeom>
+          <a:solidFill>
+            <a:srgbClr val="F0C95C"/>
+          </a:solidFill>
+          <a:ln>
+            <a:noFill/>
+          </a:ln>
+        </p:spPr>
+        <p:style>
+          <a:lnRef idx="1">
+            <a:schemeClr val="accent1"/>
+          </a:lnRef>
+          <a:fillRef idx="3">
+            <a:schemeClr val="accent1"/>
+          </a:fillRef>
+          <a:effectRef idx="2">
+            <a:schemeClr val="accent1"/>
+          </a:effectRef>
+          <a:fontRef idx="minor">
+            <a:schemeClr val="lt1"/>
+          </a:fontRef>
+        </p:style>
+        <p:txBody>
+          <a:bodyPr rtlCol="0" anchor="ctr"/>
+          <a:lstStyle/>
+          <a:p>
+            <a:pPr algn="ctr"/>
+          </a:p>
+        </p:txBody>
+      </p:sp>
+      <p:sp>
+        <p:nvSpPr>
+          <p:cNvPr id="11" name="TextBox 10"/>
+          <p:cNvSpPr txBox="1"/>
+          <p:nvPr/>
+        </p:nvSpPr>
+        <p:spPr>
+          <a:xfrm>
+            <a:off x="6480000" y="4140000"/>
+            <a:ext cx="5040000" cy="324000"/>
+          </a:xfrm>
+          <a:prstGeom prst="rect">
+            <a:avLst/>
+          </a:prstGeom>
+          <a:noFill/>
+        </p:spPr>
+        <p:txBody>
+          <a:bodyPr wrap="square" anchor="t" lIns="0" rIns="0" tIns="0" bIns="0">
+            <a:spAutoFit/>
+          </a:bodyPr>
+          <a:lstStyle/>
+          <a:p>
+            <a:pPr algn="l">
+              <a:lnSpc>
+                <a:spcPct val="120000"/>
+              </a:lnSpc>
+            </a:pPr>
+            <a:r>
+              <a:rPr sz="2000" b="1" i="0">
+                <a:solidFill>
+                  <a:srgbClr val="F0C95C"/>
+                </a:solidFill>
+                <a:latin typeface="Inter"/>
+              </a:rPr>
+              <a:t>Firmamento Technologies</a:t>
+            </a:r>
+          </a:p>
+        </p:txBody>
+      </p:sp>
+      <p:sp>
+        <p:nvSpPr>
+          <p:cNvPr id="12" name="TextBox 11"/>
+          <p:cNvSpPr txBox="1"/>
+          <p:nvPr/>
+        </p:nvSpPr>
+        <p:spPr>
+          <a:xfrm>
+            <a:off x="6480000" y="4464000"/>
+            <a:ext cx="5040000" cy="180000"/>
+          </a:xfrm>
+          <a:prstGeom prst="rect">
+            <a:avLst/>
+          </a:prstGeom>
+          <a:noFill/>
+        </p:spPr>
+        <p:txBody>
+          <a:bodyPr wrap="square" anchor="t" lIns="0" rIns="0" tIns="0" bIns="0">
+            <a:spAutoFit/>
+          </a:bodyPr>
+          <a:lstStyle/>
+          <a:p>
+            <a:pPr algn="l">
+              <a:lnSpc>
+                <a:spcPct val="120000"/>
+              </a:lnSpc>
+            </a:pPr>
+            <a:r>
+              <a:rPr sz="1100" b="0" i="1">
+                <a:solidFill>
+                  <a:srgbClr val="C9A64A"/>
+                </a:solidFill>
+                <a:latin typeface="Consolas"/>
+              </a:rPr>
+              <a:t>Deep-Tech Cooperative</a:t>
+            </a:r>
+          </a:p>
+        </p:txBody>
+      </p:sp>
+      <p:sp>
+        <p:nvSpPr>
+          <p:cNvPr id="13" name="TextBox 12"/>
+          <p:cNvSpPr txBox="1"/>
+          <p:nvPr/>
+        </p:nvSpPr>
+        <p:spPr>
+          <a:xfrm>
+            <a:off x="6480000" y="4716000"/>
+            <a:ext cx="5040000" cy="900000"/>
+          </a:xfrm>
+          <a:prstGeom prst="rect">
+            <a:avLst/>
+          </a:prstGeom>
+          <a:noFill/>
+        </p:spPr>
+        <p:txBody>
+          <a:bodyPr wrap="square" anchor="t" lIns="0" rIns="0" tIns="0" bIns="0">
+            <a:spAutoFit/>
+          </a:bodyPr>
+          <a:lstStyle/>
+          <a:p>
+            <a:pPr algn="l">
+              <a:lnSpc>
+                <a:spcPct val="150000"/>
+              </a:lnSpc>
+            </a:pPr>
+            <a:r>
+              <a:rPr sz="1300" b="0" i="0">
+                <a:solidFill>
+                  <a:srgbClr val="FFFFFF"/>
+                </a:solidFill>
+                <a:latin typeface="Consolas"/>
+              </a:rPr>
+              <a:t>Industrialization and Venture Building.</a:t>
+            </a:r>
+          </a:p>
+          <a:p>
+            <a:pPr algn="l">
+              <a:lnSpc>
+                <a:spcPct val="150000"/>
+              </a:lnSpc>
+            </a:pPr>
+            <a:r>
+              <a:rPr sz="1300" b="0" i="0">
+                <a:solidFill>
+                  <a:srgbClr val="FFFFFF"/>
+                </a:solidFill>
+                <a:latin typeface="Consolas"/>
+              </a:rPr>
+              <a:t>The product is digital sovereignty.</a:t>
+            </a:r>
+          </a:p>
+        </p:txBody>
+      </p:sp>
       <p:cxnSp>
         <p:nvCxnSpPr>
-          <p:cNvPr id="12" name="Connector 11"/>
+          <p:cNvPr id="14" name="Connector 13"/>
           <p:cNvCxnSpPr/>
           <p:nvPr/>
         </p:nvCxnSpPr>
         <p:spPr>
           <a:xfrm>
-            <a:off x="540000" y="6282000"/>
+            <a:off x="540000" y="5580000"/>
             <a:ext cx="11112119" cy="0"/>
           </a:xfrm>
           <a:prstGeom prst="line">
             <a:avLst/>
           </a:prstGeom>
-          <a:ln w="6350">
+          <a:ln w="7620">
             <a:solidFill>
               <a:srgbClr val="F0C95C"/>
             </a:solidFill>
@@ -3567,14 +3630,14 @@
       </p:cxnSp>
       <p:sp>
         <p:nvSpPr>
-          <p:cNvPr id="13" name="TextBox 12"/>
+          <p:cNvPr id="15" name="TextBox 14"/>
           <p:cNvSpPr txBox="1"/>
           <p:nvPr/>
         </p:nvSpPr>
         <p:spPr>
           <a:xfrm>
-            <a:off x="540000" y="6426000"/>
-            <a:ext cx="5400000" cy="216000"/>
+            <a:off x="540000" y="5688000"/>
+            <a:ext cx="2670029" cy="324000"/>
           </a:xfrm>
           <a:prstGeom prst="rect">
             <a:avLst/>
@@ -3593,27 +3656,27 @@
               </a:lnSpc>
             </a:pPr>
             <a:r>
-              <a:rPr sz="900" b="1" i="0">
+              <a:rPr sz="1800" b="1" i="0">
                 <a:solidFill>
                   <a:srgbClr val="F0C95C"/>
                 </a:solidFill>
                 <a:latin typeface="Inter"/>
               </a:rPr>
-              <a:t>FIRMAMENTO TECHNOLOGIES</a:t>
-            </a:r>
-          </a:p>
-        </p:txBody>
-      </p:sp>
-      <p:sp>
-        <p:nvSpPr>
-          <p:cNvPr id="14" name="TextBox 13"/>
+              <a:t>20 → 120</a:t>
+            </a:r>
+          </a:p>
+        </p:txBody>
+      </p:sp>
+      <p:sp>
+        <p:nvSpPr>
+          <p:cNvPr id="16" name="TextBox 15"/>
           <p:cNvSpPr txBox="1"/>
           <p:nvPr/>
         </p:nvSpPr>
         <p:spPr>
           <a:xfrm>
-            <a:off x="6252119" y="6426000"/>
-            <a:ext cx="5400000" cy="216000"/>
+            <a:off x="540000" y="6083999"/>
+            <a:ext cx="2670029" cy="540000"/>
           </a:xfrm>
           <a:prstGeom prst="rect">
             <a:avLst/>
@@ -3626,19 +3689,292 @@
           </a:bodyPr>
           <a:lstStyle/>
           <a:p>
-            <a:pPr algn="r">
+            <a:pPr algn="l">
+              <a:lnSpc>
+                <a:spcPct val="140000"/>
+              </a:lnSpc>
+            </a:pPr>
+            <a:r>
+              <a:rPr sz="900" b="0" i="0">
+                <a:solidFill>
+                  <a:srgbClr val="FFFFFF"/>
+                </a:solidFill>
+                <a:latin typeface="Consolas"/>
+              </a:rPr>
+              <a:t>active researchers in 10 months</a:t>
+            </a:r>
+          </a:p>
+        </p:txBody>
+      </p:sp>
+      <p:sp>
+        <p:nvSpPr>
+          <p:cNvPr id="17" name="TextBox 16"/>
+          <p:cNvSpPr txBox="1"/>
+          <p:nvPr/>
+        </p:nvSpPr>
+        <p:spPr>
+          <a:xfrm>
+            <a:off x="3318029" y="5688000"/>
+            <a:ext cx="2670029" cy="324000"/>
+          </a:xfrm>
+          <a:prstGeom prst="rect">
+            <a:avLst/>
+          </a:prstGeom>
+          <a:noFill/>
+        </p:spPr>
+        <p:txBody>
+          <a:bodyPr wrap="square" anchor="t" lIns="0" rIns="0" tIns="0" bIns="0">
+            <a:spAutoFit/>
+          </a:bodyPr>
+          <a:lstStyle/>
+          <a:p>
+            <a:pPr algn="l">
               <a:lnSpc>
                 <a:spcPct val="120000"/>
               </a:lnSpc>
             </a:pPr>
             <a:r>
+              <a:rPr sz="1800" b="1" i="0">
+                <a:solidFill>
+                  <a:srgbClr val="F0C95C"/>
+                </a:solidFill>
+                <a:latin typeface="Inter"/>
+              </a:rPr>
+              <a:t>9</a:t>
+            </a:r>
+          </a:p>
+        </p:txBody>
+      </p:sp>
+      <p:sp>
+        <p:nvSpPr>
+          <p:cNvPr id="18" name="TextBox 17"/>
+          <p:cNvSpPr txBox="1"/>
+          <p:nvPr/>
+        </p:nvSpPr>
+        <p:spPr>
+          <a:xfrm>
+            <a:off x="3318029" y="6083999"/>
+            <a:ext cx="2670029" cy="540000"/>
+          </a:xfrm>
+          <a:prstGeom prst="rect">
+            <a:avLst/>
+          </a:prstGeom>
+          <a:noFill/>
+        </p:spPr>
+        <p:txBody>
+          <a:bodyPr wrap="square" anchor="t" lIns="0" rIns="0" tIns="0" bIns="0">
+            <a:spAutoFit/>
+          </a:bodyPr>
+          <a:lstStyle/>
+          <a:p>
+            <a:pPr algn="l">
+              <a:lnSpc>
+                <a:spcPct val="140000"/>
+              </a:lnSpc>
+            </a:pPr>
+            <a:r>
               <a:rPr sz="900" b="0" i="0">
                 <a:solidFill>
                   <a:srgbClr val="FFFFFF"/>
                 </a:solidFill>
                 <a:latin typeface="Consolas"/>
               </a:rPr>
-              <a:t>Pentema pilot . Liguria SNAI . Cooperative Deep-Tech</a:t>
+              <a:t>parallel projects, Aerospace, Health, AI, Cyber, EO</a:t>
+            </a:r>
+          </a:p>
+        </p:txBody>
+      </p:sp>
+      <p:sp>
+        <p:nvSpPr>
+          <p:cNvPr id="19" name="TextBox 18"/>
+          <p:cNvSpPr txBox="1"/>
+          <p:nvPr/>
+        </p:nvSpPr>
+        <p:spPr>
+          <a:xfrm>
+            <a:off x="6096059" y="5688000"/>
+            <a:ext cx="2670029" cy="324000"/>
+          </a:xfrm>
+          <a:prstGeom prst="rect">
+            <a:avLst/>
+          </a:prstGeom>
+          <a:noFill/>
+        </p:spPr>
+        <p:txBody>
+          <a:bodyPr wrap="square" anchor="t" lIns="0" rIns="0" tIns="0" bIns="0">
+            <a:spAutoFit/>
+          </a:bodyPr>
+          <a:lstStyle/>
+          <a:p>
+            <a:pPr algn="l">
+              <a:lnSpc>
+                <a:spcPct val="120000"/>
+              </a:lnSpc>
+            </a:pPr>
+            <a:r>
+              <a:rPr sz="1800" b="1" i="0">
+                <a:solidFill>
+                  <a:srgbClr val="F0C95C"/>
+                </a:solidFill>
+                <a:latin typeface="Inter"/>
+              </a:rPr>
+              <a:t>6th worldwide</a:t>
+            </a:r>
+          </a:p>
+        </p:txBody>
+      </p:sp>
+      <p:sp>
+        <p:nvSpPr>
+          <p:cNvPr id="20" name="TextBox 19"/>
+          <p:cNvSpPr txBox="1"/>
+          <p:nvPr/>
+        </p:nvSpPr>
+        <p:spPr>
+          <a:xfrm>
+            <a:off x="6096059" y="6083999"/>
+            <a:ext cx="2670029" cy="540000"/>
+          </a:xfrm>
+          <a:prstGeom prst="rect">
+            <a:avLst/>
+          </a:prstGeom>
+          <a:noFill/>
+        </p:spPr>
+        <p:txBody>
+          <a:bodyPr wrap="square" anchor="t" lIns="0" rIns="0" tIns="0" bIns="0">
+            <a:spAutoFit/>
+          </a:bodyPr>
+          <a:lstStyle/>
+          <a:p>
+            <a:pPr algn="l">
+              <a:lnSpc>
+                <a:spcPct val="140000"/>
+              </a:lnSpc>
+            </a:pPr>
+            <a:r>
+              <a:rPr sz="900" b="0" i="0">
+                <a:solidFill>
+                  <a:srgbClr val="FFFFFF"/>
+                </a:solidFill>
+                <a:latin typeface="Consolas"/>
+              </a:rPr>
+              <a:t>UAS Challenge 2025 + Best Newcomer Award</a:t>
+            </a:r>
+          </a:p>
+        </p:txBody>
+      </p:sp>
+      <p:sp>
+        <p:nvSpPr>
+          <p:cNvPr id="21" name="TextBox 20"/>
+          <p:cNvSpPr txBox="1"/>
+          <p:nvPr/>
+        </p:nvSpPr>
+        <p:spPr>
+          <a:xfrm>
+            <a:off x="8874089" y="5688000"/>
+            <a:ext cx="2670029" cy="324000"/>
+          </a:xfrm>
+          <a:prstGeom prst="rect">
+            <a:avLst/>
+          </a:prstGeom>
+          <a:noFill/>
+        </p:spPr>
+        <p:txBody>
+          <a:bodyPr wrap="square" anchor="t" lIns="0" rIns="0" tIns="0" bIns="0">
+            <a:spAutoFit/>
+          </a:bodyPr>
+          <a:lstStyle/>
+          <a:p>
+            <a:pPr algn="l">
+              <a:lnSpc>
+                <a:spcPct val="120000"/>
+              </a:lnSpc>
+            </a:pPr>
+            <a:r>
+              <a:rPr sz="1800" b="1" i="0">
+                <a:solidFill>
+                  <a:srgbClr val="F0C95C"/>
+                </a:solidFill>
+                <a:latin typeface="Inter"/>
+              </a:rPr>
+              <a:t>Institutional</a:t>
+            </a:r>
+          </a:p>
+        </p:txBody>
+      </p:sp>
+      <p:sp>
+        <p:nvSpPr>
+          <p:cNvPr id="22" name="TextBox 21"/>
+          <p:cNvSpPr txBox="1"/>
+          <p:nvPr/>
+        </p:nvSpPr>
+        <p:spPr>
+          <a:xfrm>
+            <a:off x="8874089" y="6083999"/>
+            <a:ext cx="2670029" cy="540000"/>
+          </a:xfrm>
+          <a:prstGeom prst="rect">
+            <a:avLst/>
+          </a:prstGeom>
+          <a:noFill/>
+        </p:spPr>
+        <p:txBody>
+          <a:bodyPr wrap="square" anchor="t" lIns="0" rIns="0" tIns="0" bIns="0">
+            <a:spAutoFit/>
+          </a:bodyPr>
+          <a:lstStyle/>
+          <a:p>
+            <a:pPr algn="l">
+              <a:lnSpc>
+                <a:spcPct val="140000"/>
+              </a:lnSpc>
+            </a:pPr>
+            <a:r>
+              <a:rPr sz="900" b="0" i="0">
+                <a:solidFill>
+                  <a:srgbClr val="FFFFFF"/>
+                </a:solidFill>
+                <a:latin typeface="Consolas"/>
+              </a:rPr>
+              <a:t>University of Genoa, Liguria Region, RINA, Legacoop</a:t>
+            </a:r>
+          </a:p>
+        </p:txBody>
+      </p:sp>
+      <p:sp>
+        <p:nvSpPr>
+          <p:cNvPr id="23" name="TextBox 22"/>
+          <p:cNvSpPr txBox="1"/>
+          <p:nvPr/>
+        </p:nvSpPr>
+        <p:spPr>
+          <a:xfrm>
+            <a:off x="540000" y="6606001"/>
+            <a:ext cx="11112119" cy="180000"/>
+          </a:xfrm>
+          <a:prstGeom prst="rect">
+            <a:avLst/>
+          </a:prstGeom>
+          <a:noFill/>
+        </p:spPr>
+        <p:txBody>
+          <a:bodyPr wrap="square" anchor="t" lIns="0" rIns="0" tIns="0" bIns="0">
+            <a:spAutoFit/>
+          </a:bodyPr>
+          <a:lstStyle/>
+          <a:p>
+            <a:pPr algn="ctr">
+              <a:lnSpc>
+                <a:spcPct val="120000"/>
+              </a:lnSpc>
+            </a:pPr>
+            <a:r>
+              <a:rPr sz="700" b="0" i="0">
+                <a:solidFill>
+                  <a:srgbClr val="E6E6EA"/>
+                </a:solidFill>
+                <a:latin typeface="Consolas"/>
+              </a:rPr>
+              <a:t>FIRMAMENTO TECHNOLOGIES SOCIETA' COOPERATIVA . P.IVA IT03038500991 . PEC firmamentotechnologies@pec.it</a:t>
             </a:r>
           </a:p>
         </p:txBody>
@@ -3676,7 +4012,7 @@
             <a:avLst/>
           </a:prstGeom>
           <a:solidFill>
-            <a:srgbClr val="FFFFFF"/>
+            <a:srgbClr val="0A1A3D"/>
           </a:solidFill>
           <a:ln>
             <a:noFill/>
@@ -3713,7 +4049,7 @@
         <p:spPr>
           <a:xfrm>
             <a:off x="540000" y="432000"/>
-            <a:ext cx="10800000" cy="648000"/>
+            <a:ext cx="7200000" cy="648000"/>
           </a:xfrm>
           <a:prstGeom prst="rect">
             <a:avLst/>
@@ -3732,13 +4068,13 @@
               </a:lnSpc>
             </a:pPr>
             <a:r>
-              <a:rPr sz="3600" b="1" i="0">
-                <a:solidFill>
-                  <a:srgbClr val="0A1A3D"/>
+              <a:rPr sz="4000" b="1" i="0">
+                <a:solidFill>
+                  <a:srgbClr val="FFFFFF"/>
                 </a:solidFill>
                 <a:latin typeface="Inter"/>
               </a:rPr>
-              <a:t>Public Value &amp; Territorial Resilience</a:t>
+              <a:t>Project H.A.L.E.</a:t>
             </a:r>
           </a:p>
         </p:txBody>
@@ -3751,8 +4087,8 @@
         </p:nvSpPr>
         <p:spPr>
           <a:xfrm>
-            <a:off x="540000" y="1116000"/>
-            <a:ext cx="10800000" cy="324000"/>
+            <a:off x="540000" y="1080000"/>
+            <a:ext cx="7200000" cy="288000"/>
           </a:xfrm>
           <a:prstGeom prst="rect">
             <a:avLst/>
@@ -3771,59 +4107,69 @@
               </a:lnSpc>
             </a:pPr>
             <a:r>
-              <a:rPr sz="1500" b="0" i="0">
-                <a:solidFill>
-                  <a:srgbClr val="3A3A3A"/>
+              <a:rPr sz="1800" b="0" i="0">
+                <a:solidFill>
+                  <a:srgbClr val="FFFFFF"/>
+                </a:solidFill>
+                <a:latin typeface="Inter"/>
+              </a:rPr>
+              <a:t>(High Altitude Long Endurance)</a:t>
+            </a:r>
+          </a:p>
+        </p:txBody>
+      </p:sp>
+      <p:sp>
+        <p:nvSpPr>
+          <p:cNvPr id="5" name="TextBox 4"/>
+          <p:cNvSpPr txBox="1"/>
+          <p:nvPr/>
+        </p:nvSpPr>
+        <p:spPr>
+          <a:xfrm>
+            <a:off x="540000" y="1655999"/>
+            <a:ext cx="5400000" cy="720000"/>
+          </a:xfrm>
+          <a:prstGeom prst="rect">
+            <a:avLst/>
+          </a:prstGeom>
+          <a:noFill/>
+        </p:spPr>
+        <p:txBody>
+          <a:bodyPr wrap="square" anchor="t" lIns="0" rIns="0" tIns="0" bIns="0">
+            <a:spAutoFit/>
+          </a:bodyPr>
+          <a:lstStyle/>
+          <a:p>
+            <a:pPr algn="l">
+              <a:lnSpc>
+                <a:spcPct val="140000"/>
+              </a:lnSpc>
+            </a:pPr>
+            <a:r>
+              <a:rPr sz="1600" b="0" i="0">
+                <a:solidFill>
+                  <a:srgbClr val="FFFFFF"/>
                 </a:solidFill>
                 <a:latin typeface="Consolas"/>
               </a:rPr>
-              <a:t>Standardized plug-and-play interface for rapid sensor integration.</a:t>
-            </a:r>
-          </a:p>
-        </p:txBody>
-      </p:sp>
-      <p:sp>
-        <p:nvSpPr>
-          <p:cNvPr id="5" name="Rectangle 4"/>
-          <p:cNvSpPr/>
-          <p:nvPr/>
-        </p:nvSpPr>
-        <p:spPr>
-          <a:xfrm>
-            <a:off x="720000" y="2160000"/>
-            <a:ext cx="792000" cy="3960000"/>
-          </a:xfrm>
-          <a:prstGeom prst="rect">
-            <a:avLst/>
-          </a:prstGeom>
-          <a:solidFill>
-            <a:srgbClr val="FFFFFF"/>
-          </a:solidFill>
-          <a:ln w="19050">
-            <a:solidFill>
-              <a:srgbClr val="0A1A3D"/>
-            </a:solidFill>
-          </a:ln>
-        </p:spPr>
-        <p:style>
-          <a:lnRef idx="1">
-            <a:schemeClr val="accent1"/>
-          </a:lnRef>
-          <a:fillRef idx="3">
-            <a:schemeClr val="accent1"/>
-          </a:fillRef>
-          <a:effectRef idx="2">
-            <a:schemeClr val="accent1"/>
-          </a:effectRef>
-          <a:fontRef idx="minor">
-            <a:schemeClr val="lt1"/>
-          </a:fontRef>
-        </p:style>
-        <p:txBody>
-          <a:bodyPr rtlCol="0" anchor="ctr"/>
-          <a:lstStyle/>
-          <a:p>
-            <a:pPr algn="ctr"/>
+              <a:t>The cooperative pseudo-satellite</a:t>
+            </a:r>
+          </a:p>
+          <a:p>
+            <a:pPr algn="l">
+              <a:lnSpc>
+                <a:spcPct val="140000"/>
+              </a:lnSpc>
+            </a:pPr>
+            <a:r>
+              <a:rPr sz="1600" b="0" i="0">
+                <a:solidFill>
+                  <a:srgbClr val="FFFFFF"/>
+                </a:solidFill>
+                <a:latin typeface="Consolas"/>
+              </a:rPr>
+              <a:t>for national resilience.</a:t>
+            </a:r>
           </a:p>
         </p:txBody>
       </p:sp>
@@ -3835,8 +4181,8 @@
         </p:nvSpPr>
         <p:spPr>
           <a:xfrm>
-            <a:off x="720000" y="2160000"/>
-            <a:ext cx="792000" cy="3960000"/>
+            <a:off x="540000" y="2880000"/>
+            <a:ext cx="5400000" cy="324000"/>
           </a:xfrm>
           <a:prstGeom prst="rect">
             <a:avLst/>
@@ -3844,12 +4190,276 @@
           <a:noFill/>
         </p:spPr>
         <p:txBody>
-          <a:bodyPr wrap="square" anchor="ctr" lIns="0" rIns="0" tIns="0" bIns="0">
+          <a:bodyPr wrap="square" anchor="t" lIns="0" rIns="0" tIns="0" bIns="0">
             <a:spAutoFit/>
           </a:bodyPr>
           <a:lstStyle/>
           <a:p>
-            <a:pPr algn="ctr">
+            <a:pPr algn="l">
+              <a:lnSpc>
+                <a:spcPct val="130000"/>
+              </a:lnSpc>
+            </a:pPr>
+            <a:r>
+              <a:rPr sz="1300" b="0" i="0">
+                <a:solidFill>
+                  <a:srgbClr val="A8C5EB"/>
+                </a:solidFill>
+                <a:latin typeface="Consolas"/>
+              </a:rPr>
+              <a:t>Operating altitude </a:t>
+            </a:r>
+            <a:r>
+              <a:rPr sz="1300" b="1" i="0">
+                <a:solidFill>
+                  <a:srgbClr val="FFFFFF"/>
+                </a:solidFill>
+                <a:latin typeface="Consolas"/>
+              </a:rPr>
+              <a:t>20 km</a:t>
+            </a:r>
+          </a:p>
+        </p:txBody>
+      </p:sp>
+      <p:sp>
+        <p:nvSpPr>
+          <p:cNvPr id="7" name="TextBox 6"/>
+          <p:cNvSpPr txBox="1"/>
+          <p:nvPr/>
+        </p:nvSpPr>
+        <p:spPr>
+          <a:xfrm>
+            <a:off x="540000" y="3186000"/>
+            <a:ext cx="5400000" cy="324000"/>
+          </a:xfrm>
+          <a:prstGeom prst="rect">
+            <a:avLst/>
+          </a:prstGeom>
+          <a:noFill/>
+        </p:spPr>
+        <p:txBody>
+          <a:bodyPr wrap="square" anchor="t" lIns="0" rIns="0" tIns="0" bIns="0">
+            <a:spAutoFit/>
+          </a:bodyPr>
+          <a:lstStyle/>
+          <a:p>
+            <a:pPr algn="l">
+              <a:lnSpc>
+                <a:spcPct val="130000"/>
+              </a:lnSpc>
+            </a:pPr>
+            <a:r>
+              <a:rPr sz="1300" b="0" i="0">
+                <a:solidFill>
+                  <a:srgbClr val="A8C5EB"/>
+                </a:solidFill>
+                <a:latin typeface="Consolas"/>
+              </a:rPr>
+              <a:t>Macro-regional coverage </a:t>
+            </a:r>
+            <a:r>
+              <a:rPr sz="1300" b="1" i="0">
+                <a:solidFill>
+                  <a:srgbClr val="FFFFFF"/>
+                </a:solidFill>
+                <a:latin typeface="Consolas"/>
+              </a:rPr>
+              <a:t>&gt; 500 km</a:t>
+            </a:r>
+          </a:p>
+        </p:txBody>
+      </p:sp>
+      <p:sp>
+        <p:nvSpPr>
+          <p:cNvPr id="8" name="TextBox 7"/>
+          <p:cNvSpPr txBox="1"/>
+          <p:nvPr/>
+        </p:nvSpPr>
+        <p:spPr>
+          <a:xfrm>
+            <a:off x="540000" y="3492000"/>
+            <a:ext cx="5400000" cy="324000"/>
+          </a:xfrm>
+          <a:prstGeom prst="rect">
+            <a:avLst/>
+          </a:prstGeom>
+          <a:noFill/>
+        </p:spPr>
+        <p:txBody>
+          <a:bodyPr wrap="square" anchor="t" lIns="0" rIns="0" tIns="0" bIns="0">
+            <a:spAutoFit/>
+          </a:bodyPr>
+          <a:lstStyle/>
+          <a:p>
+            <a:pPr algn="l">
+              <a:lnSpc>
+                <a:spcPct val="130000"/>
+              </a:lnSpc>
+            </a:pPr>
+            <a:r>
+              <a:rPr sz="1300" b="0" i="0">
+                <a:solidFill>
+                  <a:srgbClr val="A8C5EB"/>
+                </a:solidFill>
+                <a:latin typeface="Consolas"/>
+              </a:rPr>
+              <a:t>Latency </a:t>
+            </a:r>
+            <a:r>
+              <a:rPr sz="1300" b="1" i="0">
+                <a:solidFill>
+                  <a:srgbClr val="FFFFFF"/>
+                </a:solidFill>
+                <a:latin typeface="Consolas"/>
+              </a:rPr>
+              <a:t>&lt; 20 ms</a:t>
+            </a:r>
+          </a:p>
+        </p:txBody>
+      </p:sp>
+      <p:sp>
+        <p:nvSpPr>
+          <p:cNvPr id="9" name="TextBox 8"/>
+          <p:cNvSpPr txBox="1"/>
+          <p:nvPr/>
+        </p:nvSpPr>
+        <p:spPr>
+          <a:xfrm>
+            <a:off x="540000" y="3798000"/>
+            <a:ext cx="5400000" cy="324000"/>
+          </a:xfrm>
+          <a:prstGeom prst="rect">
+            <a:avLst/>
+          </a:prstGeom>
+          <a:noFill/>
+        </p:spPr>
+        <p:txBody>
+          <a:bodyPr wrap="square" anchor="t" lIns="0" rIns="0" tIns="0" bIns="0">
+            <a:spAutoFit/>
+          </a:bodyPr>
+          <a:lstStyle/>
+          <a:p>
+            <a:pPr algn="l">
+              <a:lnSpc>
+                <a:spcPct val="130000"/>
+              </a:lnSpc>
+            </a:pPr>
+            <a:r>
+              <a:rPr sz="1300" b="0" i="0">
+                <a:solidFill>
+                  <a:srgbClr val="A8C5EB"/>
+                </a:solidFill>
+                <a:latin typeface="Consolas"/>
+              </a:rPr>
+              <a:t>Propulsion </a:t>
+            </a:r>
+            <a:r>
+              <a:rPr sz="1300" b="1" i="0">
+                <a:solidFill>
+                  <a:srgbClr val="FFFFFF"/>
+                </a:solidFill>
+                <a:latin typeface="Consolas"/>
+              </a:rPr>
+              <a:t>Solar-electric</a:t>
+            </a:r>
+          </a:p>
+        </p:txBody>
+      </p:sp>
+      <p:sp>
+        <p:nvSpPr>
+          <p:cNvPr id="10" name="TextBox 9"/>
+          <p:cNvSpPr txBox="1"/>
+          <p:nvPr/>
+        </p:nvSpPr>
+        <p:spPr>
+          <a:xfrm>
+            <a:off x="540000" y="4104000"/>
+            <a:ext cx="5400000" cy="324000"/>
+          </a:xfrm>
+          <a:prstGeom prst="rect">
+            <a:avLst/>
+          </a:prstGeom>
+          <a:noFill/>
+        </p:spPr>
+        <p:txBody>
+          <a:bodyPr wrap="square" anchor="t" lIns="0" rIns="0" tIns="0" bIns="0">
+            <a:spAutoFit/>
+          </a:bodyPr>
+          <a:lstStyle/>
+          <a:p>
+            <a:pPr algn="l">
+              <a:lnSpc>
+                <a:spcPct val="130000"/>
+              </a:lnSpc>
+            </a:pPr>
+            <a:r>
+              <a:rPr sz="1300" b="0" i="0">
+                <a:solidFill>
+                  <a:srgbClr val="A8C5EB"/>
+                </a:solidFill>
+                <a:latin typeface="Consolas"/>
+              </a:rPr>
+              <a:t>Endurance target </a:t>
+            </a:r>
+            <a:r>
+              <a:rPr sz="1300" b="1" i="0">
+                <a:solidFill>
+                  <a:srgbClr val="FFFFFF"/>
+                </a:solidFill>
+                <a:latin typeface="Consolas"/>
+              </a:rPr>
+              <a:t>30+ days perennial (Y3)</a:t>
+            </a:r>
+          </a:p>
+        </p:txBody>
+      </p:sp>
+      <p:pic>
+        <p:nvPicPr>
+          <p:cNvPr id="11" name="Picture 10" descr="HALE2.png"/>
+          <p:cNvPicPr>
+            <a:picLocks noChangeAspect="1"/>
+          </p:cNvPicPr>
+          <p:nvPr/>
+        </p:nvPicPr>
+        <p:blipFill>
+          <a:blip r:embed="rId2"/>
+          <a:stretch>
+            <a:fillRect/>
+          </a:stretch>
+        </p:blipFill>
+        <p:spPr>
+          <a:xfrm>
+            <a:off x="5760000" y="1260000"/>
+            <a:ext cx="4500000" cy="3060000"/>
+          </a:xfrm>
+          <a:prstGeom prst="rect">
+            <a:avLst/>
+          </a:prstGeom>
+        </p:spPr>
+      </p:pic>
+      <p:sp>
+        <p:nvSpPr>
+          <p:cNvPr id="12" name="TextBox 11"/>
+          <p:cNvSpPr txBox="1"/>
+          <p:nvPr/>
+        </p:nvSpPr>
+        <p:spPr>
+          <a:xfrm>
+            <a:off x="540000" y="4680000"/>
+            <a:ext cx="11112119" cy="288000"/>
+          </a:xfrm>
+          <a:prstGeom prst="rect">
+            <a:avLst/>
+          </a:prstGeom>
+          <a:noFill/>
+        </p:spPr>
+        <p:txBody>
+          <a:bodyPr wrap="square" anchor="t" lIns="0" rIns="0" tIns="0" bIns="0">
+            <a:spAutoFit/>
+          </a:bodyPr>
+          <a:lstStyle/>
+          <a:p>
+            <a:pPr algn="l">
               <a:lnSpc>
                 <a:spcPct val="120000"/>
               </a:lnSpc>
@@ -3857,48 +4467,344 @@
             <a:r>
               <a:rPr sz="1500" b="1" i="0">
                 <a:solidFill>
-                  <a:srgbClr val="0A1A3D"/>
-                </a:solidFill>
-                <a:latin typeface="Consolas"/>
-              </a:rPr>
-              <a:t>H.A.L.E.</a:t>
-            </a:r>
-          </a:p>
-          <a:p>
-            <a:pPr algn="ctr">
+                  <a:srgbClr val="F0C95C"/>
+                </a:solidFill>
+                <a:latin typeface="Inter"/>
+              </a:rPr>
+              <a:t>Public value, four mission profiles</a:t>
+            </a:r>
+          </a:p>
+        </p:txBody>
+      </p:sp>
+      <p:sp>
+        <p:nvSpPr>
+          <p:cNvPr id="13" name="TextBox 12"/>
+          <p:cNvSpPr txBox="1"/>
+          <p:nvPr/>
+        </p:nvSpPr>
+        <p:spPr>
+          <a:xfrm>
+            <a:off x="540000" y="5076000"/>
+            <a:ext cx="2643029" cy="251999"/>
+          </a:xfrm>
+          <a:prstGeom prst="rect">
+            <a:avLst/>
+          </a:prstGeom>
+          <a:noFill/>
+        </p:spPr>
+        <p:txBody>
+          <a:bodyPr wrap="square" anchor="t" lIns="0" rIns="0" tIns="0" bIns="0">
+            <a:spAutoFit/>
+          </a:bodyPr>
+          <a:lstStyle/>
+          <a:p>
+            <a:pPr algn="l">
               <a:lnSpc>
                 <a:spcPct val="120000"/>
               </a:lnSpc>
             </a:pPr>
             <a:r>
-              <a:rPr sz="1500" b="1" i="0">
-                <a:solidFill>
-                  <a:srgbClr val="0A1A3D"/>
+              <a:rPr sz="1200" b="1" i="0">
+                <a:solidFill>
+                  <a:srgbClr val="A8C5EB"/>
+                </a:solidFill>
+                <a:latin typeface="Inter"/>
+              </a:rPr>
+              <a:t>Disaster Response</a:t>
+            </a:r>
+          </a:p>
+        </p:txBody>
+      </p:sp>
+      <p:sp>
+        <p:nvSpPr>
+          <p:cNvPr id="14" name="TextBox 13"/>
+          <p:cNvSpPr txBox="1"/>
+          <p:nvPr/>
+        </p:nvSpPr>
+        <p:spPr>
+          <a:xfrm>
+            <a:off x="540000" y="5400000"/>
+            <a:ext cx="2643029" cy="900000"/>
+          </a:xfrm>
+          <a:prstGeom prst="rect">
+            <a:avLst/>
+          </a:prstGeom>
+          <a:noFill/>
+        </p:spPr>
+        <p:txBody>
+          <a:bodyPr wrap="square" anchor="t" lIns="0" rIns="0" tIns="0" bIns="0">
+            <a:spAutoFit/>
+          </a:bodyPr>
+          <a:lstStyle/>
+          <a:p>
+            <a:pPr algn="l">
+              <a:lnSpc>
+                <a:spcPct val="140000"/>
+              </a:lnSpc>
+            </a:pPr>
+            <a:r>
+              <a:rPr sz="1000" b="0" i="0">
+                <a:solidFill>
+                  <a:srgbClr val="FFFFFF"/>
                 </a:solidFill>
                 <a:latin typeface="Consolas"/>
               </a:rPr>
-              <a:t>Core</a:t>
+              <a:t>Rapid network restoration after floods and landslides.</a:t>
+            </a:r>
+          </a:p>
+        </p:txBody>
+      </p:sp>
+      <p:sp>
+        <p:nvSpPr>
+          <p:cNvPr id="15" name="TextBox 14"/>
+          <p:cNvSpPr txBox="1"/>
+          <p:nvPr/>
+        </p:nvSpPr>
+        <p:spPr>
+          <a:xfrm>
+            <a:off x="3363029" y="5076000"/>
+            <a:ext cx="2643029" cy="251999"/>
+          </a:xfrm>
+          <a:prstGeom prst="rect">
+            <a:avLst/>
+          </a:prstGeom>
+          <a:noFill/>
+        </p:spPr>
+        <p:txBody>
+          <a:bodyPr wrap="square" anchor="t" lIns="0" rIns="0" tIns="0" bIns="0">
+            <a:spAutoFit/>
+          </a:bodyPr>
+          <a:lstStyle/>
+          <a:p>
+            <a:pPr algn="l">
+              <a:lnSpc>
+                <a:spcPct val="120000"/>
+              </a:lnSpc>
+            </a:pPr>
+            <a:r>
+              <a:rPr sz="1200" b="1" i="0">
+                <a:solidFill>
+                  <a:srgbClr val="A8C5EB"/>
+                </a:solidFill>
+                <a:latin typeface="Inter"/>
+              </a:rPr>
+              <a:t>Environmental Monitoring</a:t>
+            </a:r>
+          </a:p>
+        </p:txBody>
+      </p:sp>
+      <p:sp>
+        <p:nvSpPr>
+          <p:cNvPr id="16" name="TextBox 15"/>
+          <p:cNvSpPr txBox="1"/>
+          <p:nvPr/>
+        </p:nvSpPr>
+        <p:spPr>
+          <a:xfrm>
+            <a:off x="3363029" y="5400000"/>
+            <a:ext cx="2643029" cy="900000"/>
+          </a:xfrm>
+          <a:prstGeom prst="rect">
+            <a:avLst/>
+          </a:prstGeom>
+          <a:noFill/>
+        </p:spPr>
+        <p:txBody>
+          <a:bodyPr wrap="square" anchor="t" lIns="0" rIns="0" tIns="0" bIns="0">
+            <a:spAutoFit/>
+          </a:bodyPr>
+          <a:lstStyle/>
+          <a:p>
+            <a:pPr algn="l">
+              <a:lnSpc>
+                <a:spcPct val="140000"/>
+              </a:lnSpc>
+            </a:pPr>
+            <a:r>
+              <a:rPr sz="1000" b="0" i="0">
+                <a:solidFill>
+                  <a:srgbClr val="FFFFFF"/>
+                </a:solidFill>
+                <a:latin typeface="Consolas"/>
+              </a:rPr>
+              <a:t>Wildfire alert and hydrogeological surveillance (multispectral / thermal).</a:t>
+            </a:r>
+          </a:p>
+        </p:txBody>
+      </p:sp>
+      <p:sp>
+        <p:nvSpPr>
+          <p:cNvPr id="17" name="TextBox 16"/>
+          <p:cNvSpPr txBox="1"/>
+          <p:nvPr/>
+        </p:nvSpPr>
+        <p:spPr>
+          <a:xfrm>
+            <a:off x="6186059" y="5076000"/>
+            <a:ext cx="2643029" cy="251999"/>
+          </a:xfrm>
+          <a:prstGeom prst="rect">
+            <a:avLst/>
+          </a:prstGeom>
+          <a:noFill/>
+        </p:spPr>
+        <p:txBody>
+          <a:bodyPr wrap="square" anchor="t" lIns="0" rIns="0" tIns="0" bIns="0">
+            <a:spAutoFit/>
+          </a:bodyPr>
+          <a:lstStyle/>
+          <a:p>
+            <a:pPr algn="l">
+              <a:lnSpc>
+                <a:spcPct val="120000"/>
+              </a:lnSpc>
+            </a:pPr>
+            <a:r>
+              <a:rPr sz="1200" b="1" i="0">
+                <a:solidFill>
+                  <a:srgbClr val="A8C5EB"/>
+                </a:solidFill>
+                <a:latin typeface="Inter"/>
+              </a:rPr>
+              <a:t>Telemedicine</a:t>
+            </a:r>
+          </a:p>
+        </p:txBody>
+      </p:sp>
+      <p:sp>
+        <p:nvSpPr>
+          <p:cNvPr id="18" name="TextBox 17"/>
+          <p:cNvSpPr txBox="1"/>
+          <p:nvPr/>
+        </p:nvSpPr>
+        <p:spPr>
+          <a:xfrm>
+            <a:off x="6186059" y="5400000"/>
+            <a:ext cx="2643029" cy="900000"/>
+          </a:xfrm>
+          <a:prstGeom prst="rect">
+            <a:avLst/>
+          </a:prstGeom>
+          <a:noFill/>
+        </p:spPr>
+        <p:txBody>
+          <a:bodyPr wrap="square" anchor="t" lIns="0" rIns="0" tIns="0" bIns="0">
+            <a:spAutoFit/>
+          </a:bodyPr>
+          <a:lstStyle/>
+          <a:p>
+            <a:pPr algn="l">
+              <a:lnSpc>
+                <a:spcPct val="140000"/>
+              </a:lnSpc>
+            </a:pPr>
+            <a:r>
+              <a:rPr sz="1000" b="0" i="0">
+                <a:solidFill>
+                  <a:srgbClr val="FFFFFF"/>
+                </a:solidFill>
+                <a:latin typeface="Consolas"/>
+              </a:rPr>
+              <a:t>Ultra-reliable links for remote health posts.</a:t>
+            </a:r>
+          </a:p>
+        </p:txBody>
+      </p:sp>
+      <p:sp>
+        <p:nvSpPr>
+          <p:cNvPr id="19" name="TextBox 18"/>
+          <p:cNvSpPr txBox="1"/>
+          <p:nvPr/>
+        </p:nvSpPr>
+        <p:spPr>
+          <a:xfrm>
+            <a:off x="9009089" y="5076000"/>
+            <a:ext cx="2643029" cy="251999"/>
+          </a:xfrm>
+          <a:prstGeom prst="rect">
+            <a:avLst/>
+          </a:prstGeom>
+          <a:noFill/>
+        </p:spPr>
+        <p:txBody>
+          <a:bodyPr wrap="square" anchor="t" lIns="0" rIns="0" tIns="0" bIns="0">
+            <a:spAutoFit/>
+          </a:bodyPr>
+          <a:lstStyle/>
+          <a:p>
+            <a:pPr algn="l">
+              <a:lnSpc>
+                <a:spcPct val="120000"/>
+              </a:lnSpc>
+            </a:pPr>
+            <a:r>
+              <a:rPr sz="1200" b="1" i="0">
+                <a:solidFill>
+                  <a:srgbClr val="A8C5EB"/>
+                </a:solidFill>
+                <a:latin typeface="Inter"/>
+              </a:rPr>
+              <a:t>Civic Connectivity</a:t>
+            </a:r>
+          </a:p>
+        </p:txBody>
+      </p:sp>
+      <p:sp>
+        <p:nvSpPr>
+          <p:cNvPr id="20" name="TextBox 19"/>
+          <p:cNvSpPr txBox="1"/>
+          <p:nvPr/>
+        </p:nvSpPr>
+        <p:spPr>
+          <a:xfrm>
+            <a:off x="9009089" y="5400000"/>
+            <a:ext cx="2643029" cy="900000"/>
+          </a:xfrm>
+          <a:prstGeom prst="rect">
+            <a:avLst/>
+          </a:prstGeom>
+          <a:noFill/>
+        </p:spPr>
+        <p:txBody>
+          <a:bodyPr wrap="square" anchor="t" lIns="0" rIns="0" tIns="0" bIns="0">
+            <a:spAutoFit/>
+          </a:bodyPr>
+          <a:lstStyle/>
+          <a:p>
+            <a:pPr algn="l">
+              <a:lnSpc>
+                <a:spcPct val="140000"/>
+              </a:lnSpc>
+            </a:pPr>
+            <a:r>
+              <a:rPr sz="1000" b="0" i="0">
+                <a:solidFill>
+                  <a:srgbClr val="FFFFFF"/>
+                </a:solidFill>
+                <a:latin typeface="Consolas"/>
+              </a:rPr>
+              <a:t>Smart agriculture and local e-governance support.</a:t>
             </a:r>
           </a:p>
         </p:txBody>
       </p:sp>
       <p:cxnSp>
         <p:nvCxnSpPr>
-          <p:cNvPr id="7" name="Connector 6"/>
+          <p:cNvPr id="21" name="Connector 20"/>
           <p:cNvCxnSpPr/>
           <p:nvPr/>
         </p:nvCxnSpPr>
         <p:spPr>
           <a:xfrm>
-            <a:off x="1584000" y="4140000"/>
-            <a:ext cx="756000" cy="0"/>
+            <a:off x="540000" y="6354001"/>
+            <a:ext cx="11112119" cy="0"/>
           </a:xfrm>
           <a:prstGeom prst="line">
             <a:avLst/>
           </a:prstGeom>
-          <a:ln w="15240">
+          <a:ln w="6350">
             <a:solidFill>
-              <a:srgbClr val="0A1A3D"/>
+              <a:srgbClr val="F0C95C"/>
             </a:solidFill>
           </a:ln>
         </p:spPr>
@@ -3919,94 +4825,14 @@
       </p:cxnSp>
       <p:sp>
         <p:nvSpPr>
-          <p:cNvPr id="8" name="Rectangle 7"/>
-          <p:cNvSpPr/>
-          <p:nvPr/>
-        </p:nvSpPr>
-        <p:spPr>
-          <a:xfrm>
-            <a:off x="2340000" y="2160000"/>
-            <a:ext cx="9000000" cy="900000"/>
-          </a:xfrm>
-          <a:prstGeom prst="rect">
-            <a:avLst/>
-          </a:prstGeom>
-          <a:solidFill>
-            <a:srgbClr val="FFFFFF"/>
-          </a:solidFill>
-          <a:ln w="12700">
-            <a:solidFill>
-              <a:srgbClr val="0A1A3D"/>
-            </a:solidFill>
-          </a:ln>
-        </p:spPr>
-        <p:style>
-          <a:lnRef idx="1">
-            <a:schemeClr val="accent1"/>
-          </a:lnRef>
-          <a:fillRef idx="3">
-            <a:schemeClr val="accent1"/>
-          </a:fillRef>
-          <a:effectRef idx="2">
-            <a:schemeClr val="accent1"/>
-          </a:effectRef>
-          <a:fontRef idx="minor">
-            <a:schemeClr val="lt1"/>
-          </a:fontRef>
-        </p:style>
-        <p:txBody>
-          <a:bodyPr rtlCol="0" anchor="ctr"/>
-          <a:lstStyle/>
-          <a:p>
-            <a:pPr algn="ctr"/>
-          </a:p>
-        </p:txBody>
-      </p:sp>
-      <p:cxnSp>
-        <p:nvCxnSpPr>
-          <p:cNvPr id="9" name="Connector 8"/>
-          <p:cNvCxnSpPr/>
-          <p:nvPr/>
-        </p:nvCxnSpPr>
-        <p:spPr>
-          <a:xfrm>
-            <a:off x="1584000" y="2610000.0"/>
-            <a:ext cx="756000" cy="0.0"/>
-          </a:xfrm>
-          <a:prstGeom prst="line">
-            <a:avLst/>
-          </a:prstGeom>
-          <a:ln w="10160">
-            <a:solidFill>
-              <a:srgbClr val="0A1A3D"/>
-            </a:solidFill>
-          </a:ln>
-        </p:spPr>
-        <p:style>
-          <a:lnRef idx="2">
-            <a:schemeClr val="accent1"/>
-          </a:lnRef>
-          <a:fillRef idx="0">
-            <a:schemeClr val="accent1"/>
-          </a:fillRef>
-          <a:effectRef idx="1">
-            <a:schemeClr val="accent1"/>
-          </a:effectRef>
-          <a:fontRef idx="minor">
-            <a:schemeClr val="tx1"/>
-          </a:fontRef>
-        </p:style>
-      </p:cxnSp>
-      <p:sp>
-        <p:nvSpPr>
-          <p:cNvPr id="10" name="TextBox 9"/>
+          <p:cNvPr id="22" name="TextBox 21"/>
           <p:cNvSpPr txBox="1"/>
           <p:nvPr/>
         </p:nvSpPr>
         <p:spPr>
           <a:xfrm>
-            <a:off x="2484000" y="2268000"/>
-            <a:ext cx="8712000" cy="324000"/>
+            <a:off x="540000" y="6498000"/>
+            <a:ext cx="5400000" cy="180000"/>
           </a:xfrm>
           <a:prstGeom prst="rect">
             <a:avLst/>
@@ -4025,514 +4851,13 @@
               </a:lnSpc>
             </a:pPr>
             <a:r>
-              <a:rPr sz="1500" b="1" i="0">
-                <a:solidFill>
-                  <a:srgbClr val="0A1A3D"/>
+              <a:rPr sz="900" b="1" i="0">
+                <a:solidFill>
+                  <a:srgbClr val="F0C95C"/>
                 </a:solidFill>
                 <a:latin typeface="Inter"/>
               </a:rPr>
-              <a:t>Disaster Response</a:t>
-            </a:r>
-          </a:p>
-        </p:txBody>
-      </p:sp>
-      <p:sp>
-        <p:nvSpPr>
-          <p:cNvPr id="11" name="TextBox 10"/>
-          <p:cNvSpPr txBox="1"/>
-          <p:nvPr/>
-        </p:nvSpPr>
-        <p:spPr>
-          <a:xfrm>
-            <a:off x="2484000" y="2628000"/>
-            <a:ext cx="8712000" cy="360000"/>
-          </a:xfrm>
-          <a:prstGeom prst="rect">
-            <a:avLst/>
-          </a:prstGeom>
-          <a:noFill/>
-        </p:spPr>
-        <p:txBody>
-          <a:bodyPr wrap="square" anchor="t" lIns="0" rIns="0" tIns="0" bIns="0">
-            <a:spAutoFit/>
-          </a:bodyPr>
-          <a:lstStyle/>
-          <a:p>
-            <a:pPr algn="l">
-              <a:lnSpc>
-                <a:spcPct val="130000"/>
-              </a:lnSpc>
-            </a:pPr>
-            <a:r>
-              <a:rPr sz="1300" b="1" i="0">
-                <a:solidFill>
-                  <a:srgbClr val="A8C5EB"/>
-                </a:solidFill>
-                <a:latin typeface="Consolas"/>
-              </a:rPr>
-              <a:t>Rapid</a:t>
-            </a:r>
-            <a:r>
-              <a:rPr sz="1300" b="0" i="0">
-                <a:solidFill>
-                  <a:srgbClr val="3A3A3A"/>
-                </a:solidFill>
-                <a:latin typeface="Consolas"/>
-              </a:rPr>
-              <a:t> network restoration after floods or landslides.</a:t>
-            </a:r>
-          </a:p>
-        </p:txBody>
-      </p:sp>
-      <p:sp>
-        <p:nvSpPr>
-          <p:cNvPr id="12" name="Rectangle 11"/>
-          <p:cNvSpPr/>
-          <p:nvPr/>
-        </p:nvSpPr>
-        <p:spPr>
-          <a:xfrm>
-            <a:off x="2340000" y="3204000"/>
-            <a:ext cx="9000000" cy="900000"/>
-          </a:xfrm>
-          <a:prstGeom prst="rect">
-            <a:avLst/>
-          </a:prstGeom>
-          <a:solidFill>
-            <a:srgbClr val="FFFFFF"/>
-          </a:solidFill>
-          <a:ln w="12700">
-            <a:solidFill>
-              <a:srgbClr val="0A1A3D"/>
-            </a:solidFill>
-          </a:ln>
-        </p:spPr>
-        <p:style>
-          <a:lnRef idx="1">
-            <a:schemeClr val="accent1"/>
-          </a:lnRef>
-          <a:fillRef idx="3">
-            <a:schemeClr val="accent1"/>
-          </a:fillRef>
-          <a:effectRef idx="2">
-            <a:schemeClr val="accent1"/>
-          </a:effectRef>
-          <a:fontRef idx="minor">
-            <a:schemeClr val="lt1"/>
-          </a:fontRef>
-        </p:style>
-        <p:txBody>
-          <a:bodyPr rtlCol="0" anchor="ctr"/>
-          <a:lstStyle/>
-          <a:p>
-            <a:pPr algn="ctr"/>
-          </a:p>
-        </p:txBody>
-      </p:sp>
-      <p:cxnSp>
-        <p:nvCxnSpPr>
-          <p:cNvPr id="13" name="Connector 12"/>
-          <p:cNvCxnSpPr/>
-          <p:nvPr/>
-        </p:nvCxnSpPr>
-        <p:spPr>
-          <a:xfrm>
-            <a:off x="1584000" y="3654000.0"/>
-            <a:ext cx="756000" cy="0.0"/>
-          </a:xfrm>
-          <a:prstGeom prst="line">
-            <a:avLst/>
-          </a:prstGeom>
-          <a:ln w="10160">
-            <a:solidFill>
-              <a:srgbClr val="0A1A3D"/>
-            </a:solidFill>
-          </a:ln>
-        </p:spPr>
-        <p:style>
-          <a:lnRef idx="2">
-            <a:schemeClr val="accent1"/>
-          </a:lnRef>
-          <a:fillRef idx="0">
-            <a:schemeClr val="accent1"/>
-          </a:fillRef>
-          <a:effectRef idx="1">
-            <a:schemeClr val="accent1"/>
-          </a:effectRef>
-          <a:fontRef idx="minor">
-            <a:schemeClr val="tx1"/>
-          </a:fontRef>
-        </p:style>
-      </p:cxnSp>
-      <p:sp>
-        <p:nvSpPr>
-          <p:cNvPr id="14" name="TextBox 13"/>
-          <p:cNvSpPr txBox="1"/>
-          <p:nvPr/>
-        </p:nvSpPr>
-        <p:spPr>
-          <a:xfrm>
-            <a:off x="2484000" y="3312000"/>
-            <a:ext cx="8712000" cy="324000"/>
-          </a:xfrm>
-          <a:prstGeom prst="rect">
-            <a:avLst/>
-          </a:prstGeom>
-          <a:noFill/>
-        </p:spPr>
-        <p:txBody>
-          <a:bodyPr wrap="square" anchor="t" lIns="0" rIns="0" tIns="0" bIns="0">
-            <a:spAutoFit/>
-          </a:bodyPr>
-          <a:lstStyle/>
-          <a:p>
-            <a:pPr algn="l">
-              <a:lnSpc>
-                <a:spcPct val="120000"/>
-              </a:lnSpc>
-            </a:pPr>
-            <a:r>
-              <a:rPr sz="1500" b="1" i="0">
-                <a:solidFill>
-                  <a:srgbClr val="0A1A3D"/>
-                </a:solidFill>
-                <a:latin typeface="Inter"/>
-              </a:rPr>
-              <a:t>Environmental Monitoring</a:t>
-            </a:r>
-          </a:p>
-        </p:txBody>
-      </p:sp>
-      <p:sp>
-        <p:nvSpPr>
-          <p:cNvPr id="15" name="TextBox 14"/>
-          <p:cNvSpPr txBox="1"/>
-          <p:nvPr/>
-        </p:nvSpPr>
-        <p:spPr>
-          <a:xfrm>
-            <a:off x="2484000" y="3672000"/>
-            <a:ext cx="8712000" cy="360000"/>
-          </a:xfrm>
-          <a:prstGeom prst="rect">
-            <a:avLst/>
-          </a:prstGeom>
-          <a:noFill/>
-        </p:spPr>
-        <p:txBody>
-          <a:bodyPr wrap="square" anchor="t" lIns="0" rIns="0" tIns="0" bIns="0">
-            <a:spAutoFit/>
-          </a:bodyPr>
-          <a:lstStyle/>
-          <a:p>
-            <a:pPr algn="l">
-              <a:lnSpc>
-                <a:spcPct val="130000"/>
-              </a:lnSpc>
-            </a:pPr>
-            <a:r>
-              <a:rPr sz="1300" b="1" i="0">
-                <a:solidFill>
-                  <a:srgbClr val="A8C5EB"/>
-                </a:solidFill>
-                <a:latin typeface="Consolas"/>
-              </a:rPr>
-              <a:t>Wildfire alert</a:t>
-            </a:r>
-            <a:r>
-              <a:rPr sz="1300" b="0" i="0">
-                <a:solidFill>
-                  <a:srgbClr val="3A3A3A"/>
-                </a:solidFill>
-                <a:latin typeface="Consolas"/>
-              </a:rPr>
-              <a:t> and hydrogeological surveillance, multispectral / thermal sensors.</a:t>
-            </a:r>
-          </a:p>
-        </p:txBody>
-      </p:sp>
-      <p:sp>
-        <p:nvSpPr>
-          <p:cNvPr id="16" name="Rectangle 15"/>
-          <p:cNvSpPr/>
-          <p:nvPr/>
-        </p:nvSpPr>
-        <p:spPr>
-          <a:xfrm>
-            <a:off x="2340000" y="4248000"/>
-            <a:ext cx="9000000" cy="900000"/>
-          </a:xfrm>
-          <a:prstGeom prst="rect">
-            <a:avLst/>
-          </a:prstGeom>
-          <a:solidFill>
-            <a:srgbClr val="FFFFFF"/>
-          </a:solidFill>
-          <a:ln w="12700">
-            <a:solidFill>
-              <a:srgbClr val="0A1A3D"/>
-            </a:solidFill>
-          </a:ln>
-        </p:spPr>
-        <p:style>
-          <a:lnRef idx="1">
-            <a:schemeClr val="accent1"/>
-          </a:lnRef>
-          <a:fillRef idx="3">
-            <a:schemeClr val="accent1"/>
-          </a:fillRef>
-          <a:effectRef idx="2">
-            <a:schemeClr val="accent1"/>
-          </a:effectRef>
-          <a:fontRef idx="minor">
-            <a:schemeClr val="lt1"/>
-          </a:fontRef>
-        </p:style>
-        <p:txBody>
-          <a:bodyPr rtlCol="0" anchor="ctr"/>
-          <a:lstStyle/>
-          <a:p>
-            <a:pPr algn="ctr"/>
-          </a:p>
-        </p:txBody>
-      </p:sp>
-      <p:cxnSp>
-        <p:nvCxnSpPr>
-          <p:cNvPr id="17" name="Connector 16"/>
-          <p:cNvCxnSpPr/>
-          <p:nvPr/>
-        </p:nvCxnSpPr>
-        <p:spPr>
-          <a:xfrm>
-            <a:off x="1584000" y="4698000.0"/>
-            <a:ext cx="756000" cy="0.0"/>
-          </a:xfrm>
-          <a:prstGeom prst="line">
-            <a:avLst/>
-          </a:prstGeom>
-          <a:ln w="10160">
-            <a:solidFill>
-              <a:srgbClr val="0A1A3D"/>
-            </a:solidFill>
-          </a:ln>
-        </p:spPr>
-        <p:style>
-          <a:lnRef idx="2">
-            <a:schemeClr val="accent1"/>
-          </a:lnRef>
-          <a:fillRef idx="0">
-            <a:schemeClr val="accent1"/>
-          </a:fillRef>
-          <a:effectRef idx="1">
-            <a:schemeClr val="accent1"/>
-          </a:effectRef>
-          <a:fontRef idx="minor">
-            <a:schemeClr val="tx1"/>
-          </a:fontRef>
-        </p:style>
-      </p:cxnSp>
-      <p:sp>
-        <p:nvSpPr>
-          <p:cNvPr id="18" name="TextBox 17"/>
-          <p:cNvSpPr txBox="1"/>
-          <p:nvPr/>
-        </p:nvSpPr>
-        <p:spPr>
-          <a:xfrm>
-            <a:off x="2484000" y="4356000"/>
-            <a:ext cx="8712000" cy="324000"/>
-          </a:xfrm>
-          <a:prstGeom prst="rect">
-            <a:avLst/>
-          </a:prstGeom>
-          <a:noFill/>
-        </p:spPr>
-        <p:txBody>
-          <a:bodyPr wrap="square" anchor="t" lIns="0" rIns="0" tIns="0" bIns="0">
-            <a:spAutoFit/>
-          </a:bodyPr>
-          <a:lstStyle/>
-          <a:p>
-            <a:pPr algn="l">
-              <a:lnSpc>
-                <a:spcPct val="120000"/>
-              </a:lnSpc>
-            </a:pPr>
-            <a:r>
-              <a:rPr sz="1500" b="1" i="0">
-                <a:solidFill>
-                  <a:srgbClr val="0A1A3D"/>
-                </a:solidFill>
-                <a:latin typeface="Inter"/>
-              </a:rPr>
-              <a:t>Telemedicine</a:t>
-            </a:r>
-          </a:p>
-        </p:txBody>
-      </p:sp>
-      <p:sp>
-        <p:nvSpPr>
-          <p:cNvPr id="19" name="TextBox 18"/>
-          <p:cNvSpPr txBox="1"/>
-          <p:nvPr/>
-        </p:nvSpPr>
-        <p:spPr>
-          <a:xfrm>
-            <a:off x="2484000" y="4716000"/>
-            <a:ext cx="8712000" cy="360000"/>
-          </a:xfrm>
-          <a:prstGeom prst="rect">
-            <a:avLst/>
-          </a:prstGeom>
-          <a:noFill/>
-        </p:spPr>
-        <p:txBody>
-          <a:bodyPr wrap="square" anchor="t" lIns="0" rIns="0" tIns="0" bIns="0">
-            <a:spAutoFit/>
-          </a:bodyPr>
-          <a:lstStyle/>
-          <a:p>
-            <a:pPr algn="l">
-              <a:lnSpc>
-                <a:spcPct val="130000"/>
-              </a:lnSpc>
-            </a:pPr>
-            <a:r>
-              <a:rPr sz="1300" b="1" i="0">
-                <a:solidFill>
-                  <a:srgbClr val="A8C5EB"/>
-                </a:solidFill>
-                <a:latin typeface="Consolas"/>
-              </a:rPr>
-              <a:t>Ultra-reliable</a:t>
-            </a:r>
-            <a:r>
-              <a:rPr sz="1300" b="0" i="0">
-                <a:solidFill>
-                  <a:srgbClr val="3A3A3A"/>
-                </a:solidFill>
-                <a:latin typeface="Consolas"/>
-              </a:rPr>
-              <a:t> network links for remote health posts.</a:t>
-            </a:r>
-          </a:p>
-        </p:txBody>
-      </p:sp>
-      <p:sp>
-        <p:nvSpPr>
-          <p:cNvPr id="20" name="Rectangle 19"/>
-          <p:cNvSpPr/>
-          <p:nvPr/>
-        </p:nvSpPr>
-        <p:spPr>
-          <a:xfrm>
-            <a:off x="2340000" y="5292000"/>
-            <a:ext cx="9000000" cy="900000"/>
-          </a:xfrm>
-          <a:prstGeom prst="rect">
-            <a:avLst/>
-          </a:prstGeom>
-          <a:solidFill>
-            <a:srgbClr val="FFFFFF"/>
-          </a:solidFill>
-          <a:ln w="12700">
-            <a:solidFill>
-              <a:srgbClr val="0A1A3D"/>
-            </a:solidFill>
-          </a:ln>
-        </p:spPr>
-        <p:style>
-          <a:lnRef idx="1">
-            <a:schemeClr val="accent1"/>
-          </a:lnRef>
-          <a:fillRef idx="3">
-            <a:schemeClr val="accent1"/>
-          </a:fillRef>
-          <a:effectRef idx="2">
-            <a:schemeClr val="accent1"/>
-          </a:effectRef>
-          <a:fontRef idx="minor">
-            <a:schemeClr val="lt1"/>
-          </a:fontRef>
-        </p:style>
-        <p:txBody>
-          <a:bodyPr rtlCol="0" anchor="ctr"/>
-          <a:lstStyle/>
-          <a:p>
-            <a:pPr algn="ctr"/>
-          </a:p>
-        </p:txBody>
-      </p:sp>
-      <p:cxnSp>
-        <p:nvCxnSpPr>
-          <p:cNvPr id="21" name="Connector 20"/>
-          <p:cNvCxnSpPr/>
-          <p:nvPr/>
-        </p:nvCxnSpPr>
-        <p:spPr>
-          <a:xfrm>
-            <a:off x="1584000" y="5742000.0"/>
-            <a:ext cx="756000" cy="0.0"/>
-          </a:xfrm>
-          <a:prstGeom prst="line">
-            <a:avLst/>
-          </a:prstGeom>
-          <a:ln w="10160">
-            <a:solidFill>
-              <a:srgbClr val="0A1A3D"/>
-            </a:solidFill>
-          </a:ln>
-        </p:spPr>
-        <p:style>
-          <a:lnRef idx="2">
-            <a:schemeClr val="accent1"/>
-          </a:lnRef>
-          <a:fillRef idx="0">
-            <a:schemeClr val="accent1"/>
-          </a:fillRef>
-          <a:effectRef idx="1">
-            <a:schemeClr val="accent1"/>
-          </a:effectRef>
-          <a:fontRef idx="minor">
-            <a:schemeClr val="tx1"/>
-          </a:fontRef>
-        </p:style>
-      </p:cxnSp>
-      <p:sp>
-        <p:nvSpPr>
-          <p:cNvPr id="22" name="TextBox 21"/>
-          <p:cNvSpPr txBox="1"/>
-          <p:nvPr/>
-        </p:nvSpPr>
-        <p:spPr>
-          <a:xfrm>
-            <a:off x="2484000" y="5400000"/>
-            <a:ext cx="8712000" cy="324000"/>
-          </a:xfrm>
-          <a:prstGeom prst="rect">
-            <a:avLst/>
-          </a:prstGeom>
-          <a:noFill/>
-        </p:spPr>
-        <p:txBody>
-          <a:bodyPr wrap="square" anchor="t" lIns="0" rIns="0" tIns="0" bIns="0">
-            <a:spAutoFit/>
-          </a:bodyPr>
-          <a:lstStyle/>
-          <a:p>
-            <a:pPr algn="l">
-              <a:lnSpc>
-                <a:spcPct val="120000"/>
-              </a:lnSpc>
-            </a:pPr>
-            <a:r>
-              <a:rPr sz="1500" b="1" i="0">
-                <a:solidFill>
-                  <a:srgbClr val="0A1A3D"/>
-                </a:solidFill>
-                <a:latin typeface="Inter"/>
-              </a:rPr>
-              <a:t>Civic Connectivity</a:t>
+              <a:t>FIRMAMENTO TECHNOLOGIES</a:t>
             </a:r>
           </a:p>
         </p:txBody>
@@ -4545,130 +4870,8 @@
         </p:nvSpPr>
         <p:spPr>
           <a:xfrm>
-            <a:off x="2484000" y="5760000"/>
-            <a:ext cx="8712000" cy="360000"/>
-          </a:xfrm>
-          <a:prstGeom prst="rect">
-            <a:avLst/>
-          </a:prstGeom>
-          <a:noFill/>
-        </p:spPr>
-        <p:txBody>
-          <a:bodyPr wrap="square" anchor="t" lIns="0" rIns="0" tIns="0" bIns="0">
-            <a:spAutoFit/>
-          </a:bodyPr>
-          <a:lstStyle/>
-          <a:p>
-            <a:pPr algn="l">
-              <a:lnSpc>
-                <a:spcPct val="130000"/>
-              </a:lnSpc>
-            </a:pPr>
-            <a:r>
-              <a:rPr sz="1300" b="1" i="0">
-                <a:solidFill>
-                  <a:srgbClr val="A8C5EB"/>
-                </a:solidFill>
-                <a:latin typeface="Consolas"/>
-              </a:rPr>
-              <a:t>Smart agriculture</a:t>
-            </a:r>
-            <a:r>
-              <a:rPr sz="1300" b="0" i="0">
-                <a:solidFill>
-                  <a:srgbClr val="3A3A3A"/>
-                </a:solidFill>
-                <a:latin typeface="Consolas"/>
-              </a:rPr>
-              <a:t> and local e-governance support.</a:t>
-            </a:r>
-          </a:p>
-        </p:txBody>
-      </p:sp>
-      <p:cxnSp>
-        <p:nvCxnSpPr>
-          <p:cNvPr id="24" name="Connector 23"/>
-          <p:cNvCxnSpPr/>
-          <p:nvPr/>
-        </p:nvCxnSpPr>
-        <p:spPr>
-          <a:xfrm>
-            <a:off x="540000" y="6282000"/>
-            <a:ext cx="11112119" cy="0"/>
-          </a:xfrm>
-          <a:prstGeom prst="line">
-            <a:avLst/>
-          </a:prstGeom>
-          <a:ln w="6350">
-            <a:solidFill>
-              <a:srgbClr val="F0C95C"/>
-            </a:solidFill>
-          </a:ln>
-        </p:spPr>
-        <p:style>
-          <a:lnRef idx="2">
-            <a:schemeClr val="accent1"/>
-          </a:lnRef>
-          <a:fillRef idx="0">
-            <a:schemeClr val="accent1"/>
-          </a:fillRef>
-          <a:effectRef idx="1">
-            <a:schemeClr val="accent1"/>
-          </a:effectRef>
-          <a:fontRef idx="minor">
-            <a:schemeClr val="tx1"/>
-          </a:fontRef>
-        </p:style>
-      </p:cxnSp>
-      <p:sp>
-        <p:nvSpPr>
-          <p:cNvPr id="25" name="TextBox 24"/>
-          <p:cNvSpPr txBox="1"/>
-          <p:nvPr/>
-        </p:nvSpPr>
-        <p:spPr>
-          <a:xfrm>
-            <a:off x="540000" y="6426000"/>
-            <a:ext cx="5400000" cy="216000"/>
-          </a:xfrm>
-          <a:prstGeom prst="rect">
-            <a:avLst/>
-          </a:prstGeom>
-          <a:noFill/>
-        </p:spPr>
-        <p:txBody>
-          <a:bodyPr wrap="square" anchor="t" lIns="0" rIns="0" tIns="0" bIns="0">
-            <a:spAutoFit/>
-          </a:bodyPr>
-          <a:lstStyle/>
-          <a:p>
-            <a:pPr algn="l">
-              <a:lnSpc>
-                <a:spcPct val="120000"/>
-              </a:lnSpc>
-            </a:pPr>
-            <a:r>
-              <a:rPr sz="900" b="1" i="0">
-                <a:solidFill>
-                  <a:srgbClr val="0A1A3D"/>
-                </a:solidFill>
-                <a:latin typeface="Inter"/>
-              </a:rPr>
-              <a:t>FIRMAMENTO TECHNOLOGIES</a:t>
-            </a:r>
-          </a:p>
-        </p:txBody>
-      </p:sp>
-      <p:sp>
-        <p:nvSpPr>
-          <p:cNvPr id="26" name="TextBox 25"/>
-          <p:cNvSpPr txBox="1"/>
-          <p:nvPr/>
-        </p:nvSpPr>
-        <p:spPr>
-          <a:xfrm>
-            <a:off x="6252119" y="6426000"/>
-            <a:ext cx="5400000" cy="216000"/>
+            <a:off x="6252119" y="6498000"/>
+            <a:ext cx="5400000" cy="180000"/>
           </a:xfrm>
           <a:prstGeom prst="rect">
             <a:avLst/>
@@ -4689,11 +4892,11 @@
             <a:r>
               <a:rPr sz="900" b="0" i="0">
                 <a:solidFill>
-                  <a:srgbClr val="3A3A3A"/>
+                  <a:srgbClr val="FFFFFF"/>
                 </a:solidFill>
                 <a:latin typeface="Consolas"/>
               </a:rPr>
-              <a:t>H.A.L.E. Stratospheric Layer . 20 km AGL</a:t>
+              <a:t>Pentema pilot . Liguria SNAI . H.A.L.E. Stratospheric Layer</a:t>
             </a:r>
           </a:p>
         </p:txBody>
@@ -5253,7 +5456,7 @@
                 </a:solidFill>
                 <a:latin typeface="Consolas"/>
               </a:rPr>
-              <a:t>10 Legacoop cooperatives . capofila Fabrica</a:t>
+              <a:t>10 Legacoop cooperatives . lead Fabrica</a:t>
             </a:r>
           </a:p>
         </p:txBody>
@@ -5388,7 +5591,7 @@
                 </a:solidFill>
                 <a:latin typeface="Inter"/>
               </a:rPr>
-              <a:t>€700k – €2M </a:t>
+              <a:t>€700k - €2M </a:t>
             </a:r>
             <a:r>
               <a:rPr sz="1200" b="0" i="0">
